--- a/site/clases/parte-1-machine-learning-clasico/074-early-stopping/clase-074-early-stopping-presentacion.pptx
+++ b/site/clases/parte-1-machine-learning-clasico/074-early-stopping/clase-074-early-stopping-presentacion.pptx
@@ -3272,7 +3272,7 @@
                 </a:solidFill>
                 <a:latin typeface="Segoe UI"/>
               </a:rPr>
-              <a:t>Parte: 1 — Machine Learning Clásico · Fuente: Géron, cap. 4.  Duración estimada: 45 min.</a:t>
+              <a:t>Parte: 1 — Machine Learning Clásico · Fuente: Géron, cap. 4.  Duración estimada: 45 min. · Nivel: Intermedio</a:t>
             </a:r>
           </a:p>
         </p:txBody>
@@ -3581,7 +3581,7 @@
                 </a:solidFill>
                 <a:latin typeface="Segoe UI"/>
               </a:rPr>
-              <a:t>Parte: 1 — Machine Learning Clásico · Fuente: Géron, cap. 4.  Duración estimada: 45 min.</a:t>
+              <a:t>Parte: 1 — Machine Learning Clásico · Fuente: Géron, cap. 4.  Duración estimada: 45 min. · Nivel: Intermedio</a:t>
             </a:r>
           </a:p>
         </p:txBody>
@@ -4823,7 +4823,7 @@
                 </a:solidFill>
                 <a:latin typeface="Segoe UI"/>
               </a:rPr>
-              <a:t>Primer bloque ejecutable del notebook.</a:t>
+              <a:t>make_regression con 50 features y ruido. Separamos train / validación / test y escalamos con StandardScaler (SGD es muy sensible a la escala).</a:t>
             </a:r>
           </a:p>
         </p:txBody>
@@ -4910,7 +4910,311 @@
                 </a:solidFill>
                 <a:latin typeface="Courier New"/>
               </a:rPr>
-              <a:t># Imports y configuración inicial</a:t>
+              <a:t>import numpy as np</a:t>
+            </a:r>
+          </a:p>
+          <a:p>
+            <a:pPr>
+              <a:defRPr sz="1200" b="0">
+                <a:solidFill>
+                  <a:srgbClr val="F8FAFC"/>
+                </a:solidFill>
+                <a:latin typeface="Courier New"/>
+              </a:defRPr>
+            </a:pPr>
+            <a:r>
+              <a:rPr sz="1200" b="0">
+                <a:solidFill>
+                  <a:srgbClr val="F8FAFC"/>
+                </a:solidFill>
+                <a:latin typeface="Courier New"/>
+              </a:rPr>
+              <a:t>import matplotlib.pyplot as plt</a:t>
+            </a:r>
+          </a:p>
+          <a:p>
+            <a:pPr>
+              <a:defRPr sz="1200" b="0">
+                <a:solidFill>
+                  <a:srgbClr val="F8FAFC"/>
+                </a:solidFill>
+                <a:latin typeface="Courier New"/>
+              </a:defRPr>
+            </a:pPr>
+            <a:r>
+              <a:rPr sz="1200" b="0">
+                <a:solidFill>
+                  <a:srgbClr val="F8FAFC"/>
+                </a:solidFill>
+                <a:latin typeface="Courier New"/>
+              </a:rPr>
+              <a:t>from sklearn.datasets import make_regression</a:t>
+            </a:r>
+          </a:p>
+          <a:p>
+            <a:pPr>
+              <a:defRPr sz="1200" b="0">
+                <a:solidFill>
+                  <a:srgbClr val="F8FAFC"/>
+                </a:solidFill>
+                <a:latin typeface="Courier New"/>
+              </a:defRPr>
+            </a:pPr>
+            <a:r>
+              <a:rPr sz="1200" b="0">
+                <a:solidFill>
+                  <a:srgbClr val="F8FAFC"/>
+                </a:solidFill>
+                <a:latin typeface="Courier New"/>
+              </a:rPr>
+              <a:t>from sklearn.model_selection import train_test_split</a:t>
+            </a:r>
+          </a:p>
+          <a:p>
+            <a:pPr>
+              <a:defRPr sz="1200" b="0">
+                <a:solidFill>
+                  <a:srgbClr val="F8FAFC"/>
+                </a:solidFill>
+                <a:latin typeface="Courier New"/>
+              </a:defRPr>
+            </a:pPr>
+            <a:r>
+              <a:rPr sz="1200" b="0">
+                <a:solidFill>
+                  <a:srgbClr val="F8FAFC"/>
+                </a:solidFill>
+                <a:latin typeface="Courier New"/>
+              </a:rPr>
+              <a:t>from sklearn.preprocessing import StandardScaler</a:t>
+            </a:r>
+          </a:p>
+          <a:p>
+            <a:pPr>
+              <a:defRPr sz="1200" b="0">
+                <a:solidFill>
+                  <a:srgbClr val="F8FAFC"/>
+                </a:solidFill>
+                <a:latin typeface="Courier New"/>
+              </a:defRPr>
+            </a:pPr>
+            <a:r>
+              <a:rPr sz="1200" b="0">
+                <a:solidFill>
+                  <a:srgbClr val="F8FAFC"/>
+                </a:solidFill>
+                <a:latin typeface="Courier New"/>
+              </a:rPr>
+              <a:t>from sklearn.metrics import mean_squared_error</a:t>
+            </a:r>
+          </a:p>
+          <a:p>
+            <a:pPr>
+              <a:defRPr sz="1200" b="0">
+                <a:solidFill>
+                  <a:srgbClr val="F8FAFC"/>
+                </a:solidFill>
+                <a:latin typeface="Courier New"/>
+              </a:defRPr>
+            </a:pPr>
+            <a:r>
+              <a:rPr sz="1200" b="0">
+                <a:solidFill>
+                  <a:srgbClr val="F8FAFC"/>
+                </a:solidFill>
+                <a:latin typeface="Courier New"/>
+              </a:rPr>
+              <a:t> </a:t>
+            </a:r>
+          </a:p>
+          <a:p>
+            <a:pPr>
+              <a:defRPr sz="1200" b="0">
+                <a:solidFill>
+                  <a:srgbClr val="F8FAFC"/>
+                </a:solidFill>
+                <a:latin typeface="Courier New"/>
+              </a:defRPr>
+            </a:pPr>
+            <a:r>
+              <a:rPr sz="1200" b="0">
+                <a:solidFill>
+                  <a:srgbClr val="F8FAFC"/>
+                </a:solidFill>
+                <a:latin typeface="Courier New"/>
+              </a:rPr>
+              <a:t>X, y = make_regression(n_samples=2000, n_features=50, noise=20, random_state=42)</a:t>
+            </a:r>
+          </a:p>
+          <a:p>
+            <a:pPr>
+              <a:defRPr sz="1200" b="0">
+                <a:solidFill>
+                  <a:srgbClr val="F8FAFC"/>
+                </a:solidFill>
+                <a:latin typeface="Courier New"/>
+              </a:defRPr>
+            </a:pPr>
+            <a:r>
+              <a:rPr sz="1200" b="0">
+                <a:solidFill>
+                  <a:srgbClr val="F8FAFC"/>
+                </a:solidFill>
+                <a:latin typeface="Courier New"/>
+              </a:rPr>
+              <a:t>X_tmp, Xte, y_tmp, yte = train_test_split(X, y, test_size=0.2, random_state=42)</a:t>
+            </a:r>
+          </a:p>
+          <a:p>
+            <a:pPr>
+              <a:defRPr sz="1200" b="0">
+                <a:solidFill>
+                  <a:srgbClr val="F8FAFC"/>
+                </a:solidFill>
+                <a:latin typeface="Courier New"/>
+              </a:defRPr>
+            </a:pPr>
+            <a:r>
+              <a:rPr sz="1200" b="0">
+                <a:solidFill>
+                  <a:srgbClr val="F8FAFC"/>
+                </a:solidFill>
+                <a:latin typeface="Courier New"/>
+              </a:rPr>
+              <a:t>Xtr, Xva, ytr, yva = train_test_split(X_tmp, y_tmp, test_size=0.25, random_state=42)  # 60/20/20</a:t>
+            </a:r>
+          </a:p>
+          <a:p>
+            <a:pPr>
+              <a:defRPr sz="1200" b="0">
+                <a:solidFill>
+                  <a:srgbClr val="F8FAFC"/>
+                </a:solidFill>
+                <a:latin typeface="Courier New"/>
+              </a:defRPr>
+            </a:pPr>
+            <a:r>
+              <a:rPr sz="1200" b="0">
+                <a:solidFill>
+                  <a:srgbClr val="F8FAFC"/>
+                </a:solidFill>
+                <a:latin typeface="Courier New"/>
+              </a:rPr>
+              <a:t>sc = StandardScaler().fit(Xtr)</a:t>
+            </a:r>
+          </a:p>
+          <a:p>
+            <a:pPr>
+              <a:defRPr sz="1200" b="0">
+                <a:solidFill>
+                  <a:srgbClr val="F8FAFC"/>
+                </a:solidFill>
+                <a:latin typeface="Courier New"/>
+              </a:defRPr>
+            </a:pPr>
+            <a:r>
+              <a:rPr sz="1200" b="0">
+                <a:solidFill>
+                  <a:srgbClr val="F8FAFC"/>
+                </a:solidFill>
+                <a:latin typeface="Courier New"/>
+              </a:rPr>
+              <a:t>Xtr, Xva, Xte = sc.transform(Xtr), sc.transform(Xva), sc.transform(Xte)</a:t>
+            </a:r>
+          </a:p>
+          <a:p>
+            <a:pPr>
+              <a:defRPr sz="1200" b="0">
+                <a:solidFill>
+                  <a:srgbClr val="F8FAFC"/>
+                </a:solidFill>
+                <a:latin typeface="Courier New"/>
+              </a:defRPr>
+            </a:pPr>
+            <a:r>
+              <a:rPr sz="1200" b="0">
+                <a:solidFill>
+                  <a:srgbClr val="F8FAFC"/>
+                </a:solidFill>
+                <a:latin typeface="Courier New"/>
+              </a:rPr>
+              <a:t> </a:t>
+            </a:r>
+          </a:p>
+          <a:p>
+            <a:pPr>
+              <a:defRPr sz="1200" b="0">
+                <a:solidFill>
+                  <a:srgbClr val="F8FAFC"/>
+                </a:solidFill>
+                <a:latin typeface="Courier New"/>
+              </a:defRPr>
+            </a:pPr>
+            <a:r>
+              <a:rPr sz="1200" b="0">
+                <a:solidFill>
+                  <a:srgbClr val="F8FAFC"/>
+                </a:solidFill>
+                <a:latin typeface="Courier New"/>
+              </a:rPr>
+              <a:t>def rmse(y_true, pred):</a:t>
+            </a:r>
+          </a:p>
+          <a:p>
+            <a:pPr>
+              <a:defRPr sz="1200" b="0">
+                <a:solidFill>
+                  <a:srgbClr val="F8FAFC"/>
+                </a:solidFill>
+                <a:latin typeface="Courier New"/>
+              </a:defRPr>
+            </a:pPr>
+            <a:r>
+              <a:rPr sz="1200" b="0">
+                <a:solidFill>
+                  <a:srgbClr val="F8FAFC"/>
+                </a:solidFill>
+                <a:latin typeface="Courier New"/>
+              </a:rPr>
+              <a:t>    return np.sqrt(mean_squared_error(y_true, pred))</a:t>
+            </a:r>
+          </a:p>
+          <a:p>
+            <a:pPr>
+              <a:defRPr sz="1200" b="0">
+                <a:solidFill>
+                  <a:srgbClr val="F8FAFC"/>
+                </a:solidFill>
+                <a:latin typeface="Courier New"/>
+              </a:defRPr>
+            </a:pPr>
+            <a:r>
+              <a:rPr sz="1200" b="0">
+                <a:solidFill>
+                  <a:srgbClr val="F8FAFC"/>
+                </a:solidFill>
+                <a:latin typeface="Courier New"/>
+              </a:rPr>
+              <a:t> </a:t>
+            </a:r>
+          </a:p>
+          <a:p>
+            <a:pPr>
+              <a:defRPr sz="1200" b="0">
+                <a:solidFill>
+                  <a:srgbClr val="F8FAFC"/>
+                </a:solidFill>
+                <a:latin typeface="Courier New"/>
+              </a:defRPr>
+            </a:pPr>
+            <a:r>
+              <a:rPr sz="1200" b="0">
+                <a:solidFill>
+                  <a:srgbClr val="F8FAFC"/>
+                </a:solidFill>
+                <a:latin typeface="Courier New"/>
+              </a:rPr>
+              <a:t>print('train', Xtr.shape[0], '| val', Xva.shape[0], '| test', Xte.shape[0])</a:t>
             </a:r>
           </a:p>
         </p:txBody>
